--- a/cursos/recursos/ganar-con-poco/20-finales-de-caballos.pptx
+++ b/cursos/recursos/ganar-con-poco/20-finales-de-caballos.pptx
@@ -4197,7 +4197,7 @@
                 </a:solidFill>
                 <a:latin typeface="Calibri"/>
               </a:rPr>
-              <a:t>Hay que cuidar un detalle: el caballo puede dar jaques dobles y horquillas en cualquier momento. Antes de cada jugada en un final de caballos, revisa qué casillas quedan al alcance del caballo rival, sobre todo las que atacan a tu rey y a una pieza o peón a la vez.</a:t>
+              <a:t>Hay que cuidar un detalle: el caballo puede dar jaques dobles y tenedores en cualquier momento. Antes de cada jugada en un final de caballos, revisa qué casillas quedan al alcance del caballo rival, sobre todo las que atacan a tu rey y a una pieza o peón a la vez.</a:t>
             </a:r>
           </a:p>
         </p:txBody>
